--- a/images/Front-design.pptx
+++ b/images/Front-design.pptx
@@ -9,6 +9,7 @@
     <p:sldId id="260" r:id="rId3"/>
     <p:sldId id="262" r:id="rId4"/>
     <p:sldId id="263" r:id="rId5"/>
+    <p:sldId id="264" r:id="rId6"/>
   </p:sldIdLst>
   <p:sldSz cx="12192000" cy="6858000"/>
   <p:notesSz cx="6858000" cy="9144000"/>
@@ -3469,7 +3470,10 @@
                 <a:schemeClr val="bg1"/>
               </a:gs>
               <a:gs pos="56000">
-                <a:srgbClr val="0277BC"/>
+                <a:schemeClr val="accent4">
+                  <a:lumMod val="20000"/>
+                  <a:lumOff val="80000"/>
+                </a:schemeClr>
               </a:gs>
             </a:gsLst>
             <a:lin ang="5400000" scaled="1"/>
@@ -3525,62 +3529,20 @@
       </p:sp>
       <p:sp>
         <p:nvSpPr>
-          <p:cNvPr id="5" name="矩形 4"/>
+          <p:cNvPr id="6" name="矩形 5"/>
           <p:cNvSpPr/>
           <p:nvPr/>
         </p:nvSpPr>
         <p:spPr>
           <a:xfrm>
-            <a:off x="2109171" y="4904533"/>
-            <a:ext cx="784189" cy="276999"/>
+            <a:off x="579121" y="957208"/>
+            <a:ext cx="3844290" cy="1138773"/>
           </a:xfrm>
           <a:prstGeom prst="rect">
             <a:avLst/>
           </a:prstGeom>
         </p:spPr>
         <p:txBody>
-          <a:bodyPr wrap="none">
-            <a:spAutoFit/>
-          </a:bodyPr>
-          <a:lstStyle/>
-          <a:p>
-            <a:pPr algn="ctr"/>
-            <a:r>
-              <a:rPr lang="en-US" altLang="zh-CN" sz="1200" dirty="0" err="1" smtClean="0">
-                <a:solidFill>
-                  <a:schemeClr val="bg1"/>
-                </a:solidFill>
-                <a:latin typeface="微软雅黑 Light" panose="020B0502040204020203" pitchFamily="34" charset="-122"/>
-                <a:ea typeface="微软雅黑 Light" panose="020B0502040204020203" pitchFamily="34" charset="-122"/>
-              </a:rPr>
-              <a:t>lianxh.cn</a:t>
-            </a:r>
-            <a:endParaRPr lang="zh-CN" altLang="en-US" sz="1200" dirty="0">
-              <a:solidFill>
-                <a:schemeClr val="bg1"/>
-              </a:solidFill>
-              <a:latin typeface="微软雅黑 Light" panose="020B0502040204020203" pitchFamily="34" charset="-122"/>
-              <a:ea typeface="微软雅黑 Light" panose="020B0502040204020203" pitchFamily="34" charset="-122"/>
-            </a:endParaRPr>
-          </a:p>
-        </p:txBody>
-      </p:sp>
-      <p:sp>
-        <p:nvSpPr>
-          <p:cNvPr id="6" name="矩形 5"/>
-          <p:cNvSpPr/>
-          <p:nvPr/>
-        </p:nvSpPr>
-        <p:spPr>
-          <a:xfrm>
-            <a:off x="579121" y="957208"/>
-            <a:ext cx="3844290" cy="646331"/>
-          </a:xfrm>
-          <a:prstGeom prst="rect">
-            <a:avLst/>
-          </a:prstGeom>
-        </p:spPr>
-        <p:txBody>
           <a:bodyPr wrap="square" lIns="36000" rIns="36000">
             <a:spAutoFit/>
           </a:bodyPr>
@@ -3590,9 +3552,7 @@
             <a:r>
               <a:rPr lang="zh-CN" altLang="en-US" sz="1200" b="1" kern="0" spc="300" dirty="0" smtClean="0">
                 <a:solidFill>
-                  <a:schemeClr val="accent5">
-                    <a:lumMod val="50000"/>
-                  </a:schemeClr>
+                  <a:srgbClr val="7030A0"/>
                 </a:solidFill>
                 <a:latin typeface="微软雅黑" panose="020B0503020204020204" pitchFamily="34" charset="-122"/>
                 <a:ea typeface="微软雅黑" panose="020B0503020204020204" pitchFamily="34" charset="-122"/>
@@ -3600,22 +3560,51 @@
               <a:t>  </a:t>
             </a:r>
             <a:r>
-              <a:rPr lang="zh-CN" altLang="en-US" sz="3600" b="1" kern="0" spc="300" dirty="0" smtClean="0">
+              <a:rPr lang="en-US" altLang="zh-CN" sz="3600" b="1" kern="0" spc="300" dirty="0" smtClean="0">
                 <a:solidFill>
-                  <a:schemeClr val="accent5">
-                    <a:lumMod val="50000"/>
-                  </a:schemeClr>
+                  <a:srgbClr val="7030A0"/>
                 </a:solidFill>
                 <a:latin typeface="微软雅黑" panose="020B0503020204020204" pitchFamily="34" charset="-122"/>
                 <a:ea typeface="微软雅黑" panose="020B0503020204020204" pitchFamily="34" charset="-122"/>
               </a:rPr>
-              <a:t>数据分析</a:t>
-            </a:r>
-            <a:endParaRPr lang="en-US" altLang="zh-CN" sz="3600" b="1" kern="0" spc="300" dirty="0" smtClean="0">
+              <a:t>Data Science </a:t>
+            </a:r>
+          </a:p>
+          <a:p>
+            <a:pPr algn="ctr"/>
+            <a:r>
+              <a:rPr lang="en-US" altLang="zh-CN" sz="3200" kern="0" spc="300" dirty="0">
+                <a:solidFill>
+                  <a:srgbClr val="7030A0"/>
+                </a:solidFill>
+                <a:latin typeface="微软雅黑" panose="020B0503020204020204" pitchFamily="34" charset="-122"/>
+                <a:ea typeface="微软雅黑" panose="020B0503020204020204" pitchFamily="34" charset="-122"/>
+              </a:rPr>
+              <a:t>with</a:t>
+            </a:r>
+            <a:r>
+              <a:rPr lang="en-US" altLang="zh-CN" sz="3200" b="1" kern="0" spc="300" dirty="0" smtClean="0">
+                <a:solidFill>
+                  <a:srgbClr val="7030A0"/>
+                </a:solidFill>
+                <a:latin typeface="微软雅黑" panose="020B0503020204020204" pitchFamily="34" charset="-122"/>
+                <a:ea typeface="微软雅黑" panose="020B0503020204020204" pitchFamily="34" charset="-122"/>
+              </a:rPr>
+              <a:t> </a:t>
+            </a:r>
+            <a:r>
+              <a:rPr lang="en-US" altLang="zh-CN" sz="3200" b="1" kern="0" spc="300" dirty="0" smtClean="0">
+                <a:solidFill>
+                  <a:srgbClr val="00B0F0"/>
+                </a:solidFill>
+                <a:latin typeface="微软雅黑" panose="020B0503020204020204" pitchFamily="34" charset="-122"/>
+                <a:ea typeface="微软雅黑" panose="020B0503020204020204" pitchFamily="34" charset="-122"/>
+              </a:rPr>
+              <a:t>Python</a:t>
+            </a:r>
+            <a:endParaRPr lang="en-US" altLang="zh-CN" sz="3200" b="1" kern="0" spc="300" dirty="0" smtClean="0">
               <a:solidFill>
-                <a:schemeClr val="accent5">
-                  <a:lumMod val="50000"/>
-                </a:schemeClr>
+                <a:srgbClr val="00B0F0"/>
               </a:solidFill>
               <a:latin typeface="微软雅黑" panose="020B0503020204020204" pitchFamily="34" charset="-122"/>
               <a:ea typeface="微软雅黑" panose="020B0503020204020204" pitchFamily="34" charset="-122"/>
@@ -3639,17 +3628,115 @@
         </p:blipFill>
         <p:spPr>
           <a:xfrm>
-            <a:off x="1607728" y="2588612"/>
-            <a:ext cx="1780971" cy="1761016"/>
+            <a:off x="2016275" y="2837036"/>
+            <a:ext cx="1129266" cy="1116613"/>
           </a:xfrm>
           <a:prstGeom prst="rect">
             <a:avLst/>
           </a:prstGeom>
         </p:spPr>
       </p:pic>
+      <p:sp>
+        <p:nvSpPr>
+          <p:cNvPr id="3" name="文本框 2"/>
+          <p:cNvSpPr txBox="1"/>
+          <p:nvPr/>
+        </p:nvSpPr>
+        <p:spPr>
+          <a:xfrm>
+            <a:off x="579120" y="457201"/>
+            <a:ext cx="3888105" cy="369332"/>
+          </a:xfrm>
+          <a:prstGeom prst="rect">
+            <a:avLst/>
+          </a:prstGeom>
+          <a:solidFill>
+            <a:srgbClr val="7030A0"/>
+          </a:solidFill>
+        </p:spPr>
+        <p:txBody>
+          <a:bodyPr wrap="square" rtlCol="0">
+            <a:spAutoFit/>
+          </a:bodyPr>
+          <a:lstStyle/>
+          <a:p>
+            <a:endParaRPr lang="zh-CN" altLang="en-US" dirty="0"/>
+          </a:p>
+        </p:txBody>
+      </p:sp>
+      <p:sp>
+        <p:nvSpPr>
+          <p:cNvPr id="8" name="文本框 7"/>
+          <p:cNvSpPr txBox="1"/>
+          <p:nvPr/>
+        </p:nvSpPr>
+        <p:spPr>
+          <a:xfrm>
+            <a:off x="575070" y="5021818"/>
+            <a:ext cx="3892155" cy="369332"/>
+          </a:xfrm>
+          <a:prstGeom prst="rect">
+            <a:avLst/>
+          </a:prstGeom>
+          <a:solidFill>
+            <a:srgbClr val="7030A0"/>
+          </a:solidFill>
+        </p:spPr>
+        <p:txBody>
+          <a:bodyPr wrap="square" rtlCol="0">
+            <a:spAutoFit/>
+          </a:bodyPr>
+          <a:lstStyle/>
+          <a:p>
+            <a:endParaRPr lang="zh-CN" altLang="en-US" dirty="0"/>
+          </a:p>
+        </p:txBody>
+      </p:sp>
+      <p:sp>
+        <p:nvSpPr>
+          <p:cNvPr id="5" name="矩形 4"/>
+          <p:cNvSpPr/>
+          <p:nvPr/>
+        </p:nvSpPr>
+        <p:spPr>
+          <a:xfrm>
+            <a:off x="1884311" y="5050821"/>
+            <a:ext cx="1308051" cy="307777"/>
+          </a:xfrm>
+          <a:prstGeom prst="rect">
+            <a:avLst/>
+          </a:prstGeom>
+        </p:spPr>
+        <p:txBody>
+          <a:bodyPr wrap="none">
+            <a:spAutoFit/>
+          </a:bodyPr>
+          <a:lstStyle/>
+          <a:p>
+            <a:pPr algn="ctr"/>
+            <a:r>
+              <a:rPr lang="en-US" altLang="zh-CN" sz="1400" dirty="0" err="1" smtClean="0">
+                <a:solidFill>
+                  <a:schemeClr val="bg1"/>
+                </a:solidFill>
+                <a:latin typeface="微软雅黑 Light" panose="020B0502040204020203" pitchFamily="34" charset="-122"/>
+                <a:ea typeface="微软雅黑 Light" panose="020B0502040204020203" pitchFamily="34" charset="-122"/>
+              </a:rPr>
+              <a:t>www.lianxh.cn</a:t>
+            </a:r>
+            <a:endParaRPr lang="zh-CN" altLang="en-US" sz="1400" dirty="0">
+              <a:solidFill>
+                <a:schemeClr val="bg1"/>
+              </a:solidFill>
+              <a:latin typeface="微软雅黑 Light" panose="020B0502040204020203" pitchFamily="34" charset="-122"/>
+              <a:ea typeface="微软雅黑 Light" panose="020B0502040204020203" pitchFamily="34" charset="-122"/>
+            </a:endParaRPr>
+          </a:p>
+        </p:txBody>
+      </p:sp>
       <p:pic>
         <p:nvPicPr>
-          <p:cNvPr id="2" name="图片 1"/>
+          <p:cNvPr id="7" name="图片 6"/>
           <p:cNvPicPr>
             <a:picLocks noChangeAspect="1"/>
           </p:cNvPicPr>
@@ -3663,8 +3750,8 @@
         </p:blipFill>
         <p:spPr>
           <a:xfrm>
-            <a:off x="6564969" y="639776"/>
-            <a:ext cx="4054191" cy="5108891"/>
+            <a:off x="6726589" y="826533"/>
+            <a:ext cx="4200508" cy="5108891"/>
           </a:xfrm>
           <a:prstGeom prst="rect">
             <a:avLst/>
@@ -3742,59 +3829,6 @@
           </a:p>
         </p:txBody>
       </p:sp>
-      <p:sp>
-        <p:nvSpPr>
-          <p:cNvPr id="4" name="矩形 3"/>
-          <p:cNvSpPr>
-            <a:spLocks noChangeAspect="1"/>
-          </p:cNvSpPr>
-          <p:nvPr/>
-        </p:nvSpPr>
-        <p:spPr>
-          <a:xfrm>
-            <a:off x="1199048" y="1893201"/>
-            <a:ext cx="1080000" cy="1080000"/>
-          </a:xfrm>
-          <a:prstGeom prst="rect">
-            <a:avLst/>
-          </a:prstGeom>
-          <a:solidFill>
-            <a:srgbClr val="7030A0"/>
-          </a:solidFill>
-          <a:ln>
-            <a:noFill/>
-          </a:ln>
-        </p:spPr>
-        <p:style>
-          <a:lnRef idx="2">
-            <a:schemeClr val="accent1">
-              <a:shade val="50000"/>
-            </a:schemeClr>
-          </a:lnRef>
-          <a:fillRef idx="1">
-            <a:schemeClr val="accent1"/>
-          </a:fillRef>
-          <a:effectRef idx="0">
-            <a:schemeClr val="accent1"/>
-          </a:effectRef>
-          <a:fontRef idx="minor">
-            <a:schemeClr val="lt1"/>
-          </a:fontRef>
-        </p:style>
-        <p:txBody>
-          <a:bodyPr rtlCol="0" anchor="ctr"/>
-          <a:lstStyle/>
-          <a:p>
-            <a:pPr algn="ctr"/>
-            <a:endParaRPr lang="zh-CN" altLang="en-US" sz="4000" dirty="0">
-              <a:solidFill>
-                <a:srgbClr val="FEC008"/>
-              </a:solidFill>
-              <a:latin typeface="Arial Black" panose="020B0A04020102020204" pitchFamily="34" charset="0"/>
-            </a:endParaRPr>
-          </a:p>
-        </p:txBody>
-      </p:sp>
       <p:pic>
         <p:nvPicPr>
           <p:cNvPr id="6" name="图片 5"/>
@@ -3875,55 +3909,85 @@
       </p:sp>
       <p:sp>
         <p:nvSpPr>
-          <p:cNvPr id="5" name="矩形 4"/>
-          <p:cNvSpPr/>
+          <p:cNvPr id="9" name="矩形 8"/>
+          <p:cNvSpPr>
+            <a:spLocks noChangeAspect="1"/>
+          </p:cNvSpPr>
           <p:nvPr/>
         </p:nvSpPr>
         <p:spPr>
           <a:xfrm>
-            <a:off x="1226087" y="1789590"/>
-            <a:ext cx="1025922" cy="820738"/>
+            <a:off x="1212600" y="1417377"/>
+            <a:ext cx="1080000" cy="1080000"/>
           </a:xfrm>
           <a:prstGeom prst="rect">
             <a:avLst/>
           </a:prstGeom>
-        </p:spPr>
-        <p:txBody>
-          <a:bodyPr wrap="none" lIns="0" tIns="0" rIns="0" bIns="0" anchor="ctr" anchorCtr="0">
-            <a:spAutoFit/>
-          </a:bodyPr>
-          <a:lstStyle/>
-          <a:p>
-            <a:r>
-              <a:rPr lang="en-US" altLang="zh-CN" sz="8000" baseline="-25000" dirty="0" err="1" smtClean="0">
+          <a:solidFill>
+            <a:srgbClr val="7030A0"/>
+          </a:solidFill>
+          <a:ln>
+            <a:noFill/>
+          </a:ln>
+        </p:spPr>
+        <p:style>
+          <a:lnRef idx="2">
+            <a:schemeClr val="accent1">
+              <a:shade val="50000"/>
+            </a:schemeClr>
+          </a:lnRef>
+          <a:fillRef idx="1">
+            <a:schemeClr val="accent1"/>
+          </a:fillRef>
+          <a:effectRef idx="0">
+            <a:schemeClr val="accent1"/>
+          </a:effectRef>
+          <a:fontRef idx="minor">
+            <a:schemeClr val="lt1"/>
+          </a:fontRef>
+        </p:style>
+        <p:txBody>
+          <a:bodyPr rtlCol="0" anchor="ctr"/>
+          <a:lstStyle/>
+          <a:p>
+            <a:pPr algn="ctr"/>
+            <a:r>
+              <a:rPr lang="en-US" altLang="zh-CN" sz="4400" b="1" spc="600" dirty="0" smtClean="0">
                 <a:solidFill>
-                  <a:srgbClr val="00B0F0"/>
+                  <a:srgbClr val="FEC008"/>
                 </a:solidFill>
-                <a:latin typeface="Arial Black" panose="020B0A04020102020204" pitchFamily="34" charset="0"/>
+                <a:latin typeface="Algerian" panose="04020705040A02060702" pitchFamily="82" charset="0"/>
               </a:rPr>
-              <a:t>P</a:t>
-            </a:r>
-            <a:r>
-              <a:rPr lang="en-US" altLang="zh-CN" sz="8000" baseline="-25000" dirty="0" err="1" smtClean="0">
+              <a:t>DS</a:t>
+            </a:r>
+          </a:p>
+          <a:p>
+            <a:pPr algn="ctr">
+              <a:lnSpc>
+                <a:spcPts val="2300"/>
+              </a:lnSpc>
+            </a:pPr>
+            <a:r>
+              <a:rPr lang="en-US" altLang="zh-CN" sz="4000" b="1" dirty="0" smtClean="0">
                 <a:solidFill>
-                  <a:srgbClr val="FFC000"/>
+                  <a:schemeClr val="bg1"/>
                 </a:solidFill>
-                <a:latin typeface="Arial Black" panose="020B0A04020102020204" pitchFamily="34" charset="0"/>
+                <a:latin typeface="Agency FB" panose="020B0503020202020204" pitchFamily="34" charset="0"/>
               </a:rPr>
-              <a:t>D</a:t>
-            </a:r>
-            <a:endParaRPr lang="zh-CN" altLang="en-US" sz="8000" baseline="-25000" dirty="0">
+              <a:t>book</a:t>
+            </a:r>
+            <a:endParaRPr lang="zh-CN" altLang="en-US" sz="4000" b="1" dirty="0">
               <a:solidFill>
-                <a:srgbClr val="FFC000"/>
+                <a:schemeClr val="bg1"/>
               </a:solidFill>
-              <a:latin typeface="Arial Black" panose="020B0A04020102020204" pitchFamily="34" charset="0"/>
+              <a:latin typeface="Agency FB" panose="020B0503020202020204" pitchFamily="34" charset="0"/>
             </a:endParaRPr>
           </a:p>
         </p:txBody>
       </p:sp>
       <p:pic>
         <p:nvPicPr>
-          <p:cNvPr id="13" name="图片 12"/>
+          <p:cNvPr id="2" name="图片 1"/>
           <p:cNvPicPr>
             <a:picLocks noChangeAspect="1"/>
           </p:cNvPicPr>
@@ -3937,8 +4001,8 @@
         </p:blipFill>
         <p:spPr>
           <a:xfrm>
-            <a:off x="5181520" y="2694368"/>
-            <a:ext cx="1828959" cy="1469263"/>
+            <a:off x="5861659" y="1788769"/>
+            <a:ext cx="602032" cy="594412"/>
           </a:xfrm>
           <a:prstGeom prst="rect">
             <a:avLst/>
@@ -4178,6 +4242,228 @@
     <p:extLst>
       <p:ext uri="{BB962C8B-B14F-4D97-AF65-F5344CB8AC3E}">
         <p14:creationId xmlns:p14="http://schemas.microsoft.com/office/powerpoint/2010/main" val="968000087"/>
+      </p:ext>
+    </p:extLst>
+  </p:cSld>
+  <p:clrMapOvr>
+    <a:masterClrMapping/>
+  </p:clrMapOvr>
+</p:sld>
+</file>
+
+<file path=ppt/slides/slide5.xml><?xml version="1.0" encoding="utf-8"?>
+<p:sld xmlns:a="http://schemas.openxmlformats.org/drawingml/2006/main" xmlns:r="http://schemas.openxmlformats.org/officeDocument/2006/relationships" xmlns:p="http://schemas.openxmlformats.org/presentationml/2006/main">
+  <p:cSld>
+    <p:spTree>
+      <p:nvGrpSpPr>
+        <p:cNvPr id="1" name=""/>
+        <p:cNvGrpSpPr/>
+        <p:nvPr/>
+      </p:nvGrpSpPr>
+      <p:grpSpPr>
+        <a:xfrm>
+          <a:off x="0" y="0"/>
+          <a:ext cx="0" cy="0"/>
+          <a:chOff x="0" y="0"/>
+          <a:chExt cx="0" cy="0"/>
+        </a:xfrm>
+      </p:grpSpPr>
+      <p:sp>
+        <p:nvSpPr>
+          <p:cNvPr id="4" name="正五边形 3"/>
+          <p:cNvSpPr/>
+          <p:nvPr/>
+        </p:nvSpPr>
+        <p:spPr>
+          <a:xfrm>
+            <a:off x="1095375" y="828674"/>
+            <a:ext cx="2962275" cy="2695575"/>
+          </a:xfrm>
+          <a:prstGeom prst="pentagon">
+            <a:avLst/>
+          </a:prstGeom>
+          <a:pattFill prst="diagBrick">
+            <a:fgClr>
+              <a:schemeClr val="accent4"/>
+            </a:fgClr>
+            <a:bgClr>
+              <a:schemeClr val="bg1"/>
+            </a:bgClr>
+          </a:pattFill>
+          <a:ln w="63500">
+            <a:gradFill flip="none" rotWithShape="1">
+              <a:gsLst>
+                <a:gs pos="0">
+                  <a:schemeClr val="accent1">
+                    <a:lumMod val="0"/>
+                    <a:lumOff val="100000"/>
+                  </a:schemeClr>
+                </a:gs>
+                <a:gs pos="0">
+                  <a:schemeClr val="accent5">
+                    <a:lumMod val="85000"/>
+                  </a:schemeClr>
+                </a:gs>
+              </a:gsLst>
+              <a:path path="circle">
+                <a:fillToRect l="50000" t="-80000" r="50000" b="180000"/>
+              </a:path>
+              <a:tileRect/>
+            </a:gradFill>
+          </a:ln>
+        </p:spPr>
+        <p:style>
+          <a:lnRef idx="2">
+            <a:schemeClr val="accent1">
+              <a:shade val="50000"/>
+            </a:schemeClr>
+          </a:lnRef>
+          <a:fillRef idx="1">
+            <a:schemeClr val="accent1"/>
+          </a:fillRef>
+          <a:effectRef idx="0">
+            <a:schemeClr val="accent1"/>
+          </a:effectRef>
+          <a:fontRef idx="minor">
+            <a:schemeClr val="lt1"/>
+          </a:fontRef>
+        </p:style>
+        <p:txBody>
+          <a:bodyPr rtlCol="0" anchor="ctr"/>
+          <a:lstStyle/>
+          <a:p>
+            <a:pPr algn="ctr"/>
+            <a:endParaRPr lang="zh-CN" altLang="en-US" dirty="0">
+              <a:latin typeface="Arial" panose="020B0604020202020204" pitchFamily="34" charset="0"/>
+              <a:ea typeface="微软雅黑" panose="020B0503020204020204" pitchFamily="34" charset="-122"/>
+              <a:cs typeface="Arial" panose="020B0604020202020204" pitchFamily="34" charset="0"/>
+            </a:endParaRPr>
+          </a:p>
+        </p:txBody>
+      </p:sp>
+      <p:sp>
+        <p:nvSpPr>
+          <p:cNvPr id="5" name="矩形 4"/>
+          <p:cNvSpPr/>
+          <p:nvPr/>
+        </p:nvSpPr>
+        <p:spPr>
+          <a:xfrm>
+            <a:off x="1575276" y="2650603"/>
+            <a:ext cx="2002471" cy="523220"/>
+          </a:xfrm>
+          <a:prstGeom prst="rect">
+            <a:avLst/>
+          </a:prstGeom>
+        </p:spPr>
+        <p:txBody>
+          <a:bodyPr wrap="none">
+            <a:spAutoFit/>
+          </a:bodyPr>
+          <a:lstStyle/>
+          <a:p>
+            <a:pPr algn="ctr"/>
+            <a:r>
+              <a:rPr lang="en-US" altLang="zh-CN" sz="2800" spc="-150" dirty="0">
+                <a:solidFill>
+                  <a:schemeClr val="accent1">
+                    <a:lumMod val="50000"/>
+                  </a:schemeClr>
+                </a:solidFill>
+                <a:latin typeface="Fira Code Medium" pitchFamily="1" charset="0"/>
+                <a:ea typeface="Fira Code Medium" pitchFamily="1" charset="0"/>
+                <a:cs typeface="Fira Code Medium" pitchFamily="1" charset="0"/>
+              </a:rPr>
+              <a:t>Stata 101</a:t>
+            </a:r>
+            <a:endParaRPr lang="zh-CN" altLang="en-US" sz="2800" spc="-150" dirty="0">
+              <a:solidFill>
+                <a:schemeClr val="accent1">
+                  <a:lumMod val="50000"/>
+                </a:schemeClr>
+              </a:solidFill>
+              <a:latin typeface="Fira Code Medium" pitchFamily="1" charset="0"/>
+              <a:ea typeface="微软雅黑" panose="020B0503020204020204" pitchFamily="34" charset="-122"/>
+              <a:cs typeface="Fira Code Medium" pitchFamily="1" charset="0"/>
+            </a:endParaRPr>
+          </a:p>
+        </p:txBody>
+      </p:sp>
+      <p:sp>
+        <p:nvSpPr>
+          <p:cNvPr id="6" name="流程图: 多文档 5"/>
+          <p:cNvSpPr/>
+          <p:nvPr/>
+        </p:nvSpPr>
+        <p:spPr>
+          <a:xfrm>
+            <a:off x="2096161" y="1551007"/>
+            <a:ext cx="960699" cy="868102"/>
+          </a:xfrm>
+          <a:prstGeom prst="flowChartMultidocument">
+            <a:avLst/>
+          </a:prstGeom>
+          <a:solidFill>
+            <a:schemeClr val="accent2">
+              <a:lumMod val="60000"/>
+              <a:lumOff val="40000"/>
+              <a:alpha val="61000"/>
+            </a:schemeClr>
+          </a:solidFill>
+        </p:spPr>
+        <p:style>
+          <a:lnRef idx="2">
+            <a:schemeClr val="accent1">
+              <a:shade val="50000"/>
+            </a:schemeClr>
+          </a:lnRef>
+          <a:fillRef idx="1">
+            <a:schemeClr val="accent1"/>
+          </a:fillRef>
+          <a:effectRef idx="0">
+            <a:schemeClr val="accent1"/>
+          </a:effectRef>
+          <a:fontRef idx="minor">
+            <a:schemeClr val="lt1"/>
+          </a:fontRef>
+        </p:style>
+        <p:txBody>
+          <a:bodyPr rtlCol="0" anchor="ctr"/>
+          <a:lstStyle/>
+          <a:p>
+            <a:pPr algn="ctr"/>
+            <a:endParaRPr lang="zh-CN" altLang="en-US"/>
+          </a:p>
+        </p:txBody>
+      </p:sp>
+      <p:pic>
+        <p:nvPicPr>
+          <p:cNvPr id="7" name="图片 6"/>
+          <p:cNvPicPr>
+            <a:picLocks noChangeAspect="1"/>
+          </p:cNvPicPr>
+          <p:nvPr/>
+        </p:nvPicPr>
+        <p:blipFill>
+          <a:blip r:embed="rId2"/>
+          <a:stretch>
+            <a:fillRect/>
+          </a:stretch>
+        </p:blipFill>
+        <p:spPr>
+          <a:xfrm>
+            <a:off x="6950774" y="1431630"/>
+            <a:ext cx="3036071" cy="2767824"/>
+          </a:xfrm>
+          <a:prstGeom prst="rect">
+            <a:avLst/>
+          </a:prstGeom>
+        </p:spPr>
+      </p:pic>
+    </p:spTree>
+    <p:extLst>
+      <p:ext uri="{BB962C8B-B14F-4D97-AF65-F5344CB8AC3E}">
+        <p14:creationId xmlns:p14="http://schemas.microsoft.com/office/powerpoint/2010/main" val="824438972"/>
       </p:ext>
     </p:extLst>
   </p:cSld>
